--- a/Homework/week_10/17415009_서보근_보고서_10주차.pptx
+++ b/Homework/week_10/17415009_서보근_보고서_10주차.pptx
@@ -5,10 +5,10 @@
     <p:sldMasterId id="2147483660" r:id="rId1"/>
   </p:sldMasterIdLst>
   <p:notesMasterIdLst>
-    <p:notesMasterId r:id="rId9"/>
+    <p:notesMasterId r:id="rId10"/>
   </p:notesMasterIdLst>
   <p:handoutMasterIdLst>
-    <p:handoutMasterId r:id="rId10"/>
+    <p:handoutMasterId r:id="rId11"/>
   </p:handoutMasterIdLst>
   <p:sldIdLst>
     <p:sldId id="725" r:id="rId2"/>
@@ -17,7 +17,8 @@
     <p:sldId id="1602" r:id="rId5"/>
     <p:sldId id="1603" r:id="rId6"/>
     <p:sldId id="1604" r:id="rId7"/>
-    <p:sldId id="1554" r:id="rId8"/>
+    <p:sldId id="1605" r:id="rId8"/>
+    <p:sldId id="1554" r:id="rId9"/>
   </p:sldIdLst>
   <p:sldSz cx="12192000" cy="6858000"/>
   <p:notesSz cx="6858000" cy="9144000"/>
@@ -3152,7 +3153,7 @@
                   <a:cs typeface="+mn-cs"/>
                 </a:defRPr>
               </a:pPr>
-              <a:endParaRPr lang="ko-KR"/>
+              <a:endParaRPr lang="ko-KR" altLang="en-US"/>
             </a:p>
           </c:txPr>
         </c:title>
@@ -3285,7 +3286,7 @@
                   <a:cs typeface="+mn-cs"/>
                 </a:defRPr>
               </a:pPr>
-              <a:endParaRPr lang="ko-KR"/>
+              <a:endParaRPr lang="ko-KR" altLang="en-US"/>
             </a:p>
           </c:txPr>
         </c:title>
@@ -10322,7 +10323,7 @@
               <a:pPr lvl="0">
                 <a:defRPr/>
               </a:pPr>
-              <a:t>2025-11-27</a:t>
+              <a:t>2025-12-03</a:t>
             </a:fld>
             <a:endParaRPr lang="ko-KR" altLang="en-US"/>
           </a:p>
@@ -10512,7 +10513,7 @@
               <a:pPr lvl="0">
                 <a:defRPr/>
               </a:pPr>
-              <a:t>2025-11-27</a:t>
+              <a:t>2025-12-03</a:t>
             </a:fld>
             <a:endParaRPr lang="ko-KR" altLang="en-US"/>
           </a:p>
@@ -11237,7 +11238,7 @@
               <a:pPr lvl="0">
                 <a:defRPr/>
               </a:pPr>
-              <a:t>7</a:t>
+              <a:t>8</a:t>
             </a:fld>
             <a:endParaRPr lang="ko-KR" altLang="en-US"/>
           </a:p>
@@ -18110,7 +18111,7 @@
     <mc:Choice Requires="p14">
       <p:transition/>
     </mc:Choice>
-    <mc:Fallback xmlns="" xmlns:c="http://schemas.openxmlformats.org/drawingml/2006/chart" xmlns:dgm="http://schemas.openxmlformats.org/drawingml/2006/diagram" xmlns:dsp="http://schemas.microsoft.com/office/drawing/2008/diagram">
+    <mc:Fallback xmlns:dsp="http://schemas.microsoft.com/office/drawing/2008/diagram" xmlns:dgm="http://schemas.openxmlformats.org/drawingml/2006/diagram" xmlns:c="http://schemas.openxmlformats.org/drawingml/2006/chart" xmlns="">
       <p:transition/>
     </mc:Fallback>
   </mc:AlternateContent>
@@ -19611,7 +19612,7 @@
     <mc:Choice Requires="p14">
       <p:transition/>
     </mc:Choice>
-    <mc:Fallback xmlns="" xmlns:c="http://schemas.openxmlformats.org/drawingml/2006/chart" xmlns:dgm="http://schemas.openxmlformats.org/drawingml/2006/diagram" xmlns:dsp="http://schemas.microsoft.com/office/drawing/2008/diagram">
+    <mc:Fallback xmlns:dsp="http://schemas.microsoft.com/office/drawing/2008/diagram" xmlns:dgm="http://schemas.openxmlformats.org/drawingml/2006/diagram" xmlns:c="http://schemas.openxmlformats.org/drawingml/2006/chart" xmlns="">
       <p:transition/>
     </mc:Fallback>
   </mc:AlternateContent>
@@ -21379,7 +21380,7 @@
     <mc:Choice Requires="p14">
       <p:transition/>
     </mc:Choice>
-    <mc:Fallback xmlns="" xmlns:c="http://schemas.openxmlformats.org/drawingml/2006/chart" xmlns:dgm="http://schemas.openxmlformats.org/drawingml/2006/diagram" xmlns:dsp="http://schemas.microsoft.com/office/drawing/2008/diagram">
+    <mc:Fallback xmlns:dsp="http://schemas.microsoft.com/office/drawing/2008/diagram" xmlns:dgm="http://schemas.openxmlformats.org/drawingml/2006/diagram" xmlns:c="http://schemas.openxmlformats.org/drawingml/2006/chart" xmlns="">
       <p:transition/>
     </mc:Fallback>
   </mc:AlternateContent>
@@ -22300,8 +22301,8 @@
           <a:chExt cx="0" cy="0"/>
         </a:xfrm>
       </p:grpSpPr>
-      <mc:AlternateContent xmlns:mc="http://schemas.openxmlformats.org/markup-compatibility/2006">
-        <mc:Choice xmlns:a14="http://schemas.microsoft.com/office/drawing/2010/main" Requires="a14">
+      <mc:AlternateContent xmlns:mc="http://schemas.openxmlformats.org/markup-compatibility/2006" xmlns:a14="http://schemas.microsoft.com/office/drawing/2010/main">
+        <mc:Choice Requires="a14">
           <p:sp>
             <p:nvSpPr>
               <p:cNvPr id="2" name="텍스트 개체 틀 1">
@@ -23003,7 +23004,7 @@
             </p:txBody>
           </p:sp>
         </mc:Choice>
-        <mc:Fallback>
+        <mc:Fallback xmlns="">
           <p:sp>
             <p:nvSpPr>
               <p:cNvPr id="2" name="텍스트 개체 틀 1">
@@ -23047,8 +23048,8 @@
           </p:sp>
         </mc:Fallback>
       </mc:AlternateContent>
-      <mc:AlternateContent xmlns:mc="http://schemas.openxmlformats.org/markup-compatibility/2006">
-        <mc:Choice xmlns:a14="http://schemas.microsoft.com/office/drawing/2010/main" Requires="a14">
+      <mc:AlternateContent xmlns:mc="http://schemas.openxmlformats.org/markup-compatibility/2006" xmlns:a14="http://schemas.microsoft.com/office/drawing/2010/main">
+        <mc:Choice Requires="a14">
           <p:sp>
             <p:nvSpPr>
               <p:cNvPr id="3" name="제목 2">
@@ -23124,7 +23125,7 @@
             </p:txBody>
           </p:sp>
         </mc:Choice>
-        <mc:Fallback>
+        <mc:Fallback xmlns="">
           <p:sp>
             <p:nvSpPr>
               <p:cNvPr id="3" name="제목 2">
@@ -23338,8 +23339,8 @@
           </a:graphicData>
         </a:graphic>
       </p:graphicFrame>
-      <mc:AlternateContent xmlns:mc="http://schemas.openxmlformats.org/markup-compatibility/2006">
-        <mc:Choice xmlns:a14="http://schemas.microsoft.com/office/drawing/2010/main" Requires="a14">
+      <mc:AlternateContent xmlns:mc="http://schemas.openxmlformats.org/markup-compatibility/2006" xmlns:a14="http://schemas.microsoft.com/office/drawing/2010/main">
+        <mc:Choice Requires="a14">
           <p:sp>
             <p:nvSpPr>
               <p:cNvPr id="16" name="TextBox 15">
@@ -23458,7 +23459,7 @@
             </p:txBody>
           </p:sp>
         </mc:Choice>
-        <mc:Fallback>
+        <mc:Fallback xmlns="">
           <p:sp>
             <p:nvSpPr>
               <p:cNvPr id="16" name="TextBox 15">
@@ -23503,8 +23504,8 @@
           </p:sp>
         </mc:Fallback>
       </mc:AlternateContent>
-      <mc:AlternateContent xmlns:mc="http://schemas.openxmlformats.org/markup-compatibility/2006">
-        <mc:Choice xmlns:a14="http://schemas.microsoft.com/office/drawing/2010/main" Requires="a14">
+      <mc:AlternateContent xmlns:mc="http://schemas.openxmlformats.org/markup-compatibility/2006" xmlns:a14="http://schemas.microsoft.com/office/drawing/2010/main">
+        <mc:Choice Requires="a14">
           <p:sp>
             <p:nvSpPr>
               <p:cNvPr id="17" name="TextBox 16">
@@ -23614,7 +23615,7 @@
             </p:txBody>
           </p:sp>
         </mc:Choice>
-        <mc:Fallback>
+        <mc:Fallback xmlns="">
           <p:sp>
             <p:nvSpPr>
               <p:cNvPr id="17" name="TextBox 16">
@@ -24448,8 +24449,8 @@
           <a:chExt cx="0" cy="0"/>
         </a:xfrm>
       </p:grpSpPr>
-      <mc:AlternateContent xmlns:mc="http://schemas.openxmlformats.org/markup-compatibility/2006">
-        <mc:Choice xmlns:a14="http://schemas.microsoft.com/office/drawing/2010/main" Requires="a14">
+      <mc:AlternateContent xmlns:mc="http://schemas.openxmlformats.org/markup-compatibility/2006" xmlns:a14="http://schemas.microsoft.com/office/drawing/2010/main">
+        <mc:Choice Requires="a14">
           <p:sp>
             <p:nvSpPr>
               <p:cNvPr id="3" name="제목 2">
@@ -24525,7 +24526,7 @@
             </p:txBody>
           </p:sp>
         </mc:Choice>
-        <mc:Fallback>
+        <mc:Fallback xmlns="">
           <p:sp>
             <p:nvSpPr>
               <p:cNvPr id="3" name="제목 2">
@@ -24585,8 +24586,8 @@
             <a:chExt cx="4572000" cy="2974032"/>
           </a:xfrm>
         </p:grpSpPr>
-        <mc:AlternateContent xmlns:mc="http://schemas.openxmlformats.org/markup-compatibility/2006">
-          <mc:Choice xmlns:a14="http://schemas.microsoft.com/office/drawing/2010/main" Requires="a14">
+        <mc:AlternateContent xmlns:mc="http://schemas.openxmlformats.org/markup-compatibility/2006" xmlns:a14="http://schemas.microsoft.com/office/drawing/2010/main">
+          <mc:Choice Requires="a14">
             <p:sp>
               <p:nvSpPr>
                 <p:cNvPr id="17" name="TextBox 16">
@@ -24729,7 +24730,7 @@
               </p:txBody>
             </p:sp>
           </mc:Choice>
-          <mc:Fallback>
+          <mc:Fallback xmlns="">
             <p:sp>
               <p:nvSpPr>
                 <p:cNvPr id="17" name="TextBox 16">
@@ -24774,8 +24775,8 @@
             </p:sp>
           </mc:Fallback>
         </mc:AlternateContent>
-        <mc:AlternateContent xmlns:mc="http://schemas.openxmlformats.org/markup-compatibility/2006">
-          <mc:Choice xmlns:a14="http://schemas.microsoft.com/office/drawing/2010/main" Requires="a14">
+        <mc:AlternateContent xmlns:mc="http://schemas.openxmlformats.org/markup-compatibility/2006" xmlns:a14="http://schemas.microsoft.com/office/drawing/2010/main">
+          <mc:Choice Requires="a14">
             <p:graphicFrame>
               <p:nvGraphicFramePr>
                 <p:cNvPr id="4" name="차트 3">
@@ -24807,7 +24808,7 @@
               </a:graphic>
             </p:graphicFrame>
           </mc:Choice>
-          <mc:Fallback>
+          <mc:Fallback xmlns="">
             <p:graphicFrame>
               <p:nvGraphicFramePr>
                 <p:cNvPr id="4" name="차트 3">
@@ -24834,7 +24835,7 @@
               </p:xfrm>
               <a:graphic>
                 <a:graphicData uri="http://schemas.openxmlformats.org/drawingml/2006/chart">
-                  <c:chart xmlns:c="http://schemas.openxmlformats.org/drawingml/2006/chart" xmlns:r="http://schemas.openxmlformats.org/officeDocument/2006/relationships" r:id="rId4"/>
+                  <c:chart xmlns:c="http://schemas.openxmlformats.org/drawingml/2006/chart" xmlns:r="http://schemas.openxmlformats.org/officeDocument/2006/relationships" r:id="rId5"/>
                 </a:graphicData>
               </a:graphic>
             </p:graphicFrame>
@@ -25707,7 +25708,7 @@
             <p:nvPr/>
           </p:nvPicPr>
           <p:blipFill>
-            <a:blip r:embed="rId5">
+            <a:blip r:embed="rId6">
               <a:extLst>
                 <a:ext uri="{28A0092B-C50C-407E-A947-70E740481C1C}">
                   <a14:useLocalDpi xmlns:a14="http://schemas.microsoft.com/office/drawing/2010/main" val="0"/>
@@ -25743,7 +25744,7 @@
             <p:nvPr/>
           </p:nvPicPr>
           <p:blipFill>
-            <a:blip r:embed="rId6">
+            <a:blip r:embed="rId7">
               <a:extLst>
                 <a:ext uri="{28A0092B-C50C-407E-A947-70E740481C1C}">
                   <a14:useLocalDpi xmlns:a14="http://schemas.microsoft.com/office/drawing/2010/main" val="0"/>
@@ -25979,6 +25980,1543 @@
       </p:grpSpPr>
       <p:sp>
         <p:nvSpPr>
+          <p:cNvPr id="3" name="제목 2">
+            <a:extLst>
+              <a:ext uri="{FF2B5EF4-FFF2-40B4-BE49-F238E27FC236}">
+                <a16:creationId xmlns:a16="http://schemas.microsoft.com/office/drawing/2014/main" id="{B3A25FE0-1A9D-365B-1359-423BA4CD8C60}"/>
+              </a:ext>
+            </a:extLst>
+          </p:cNvPr>
+          <p:cNvSpPr>
+            <a:spLocks noGrp="1"/>
+          </p:cNvSpPr>
+          <p:nvPr>
+            <p:ph type="title"/>
+          </p:nvPr>
+        </p:nvSpPr>
+        <p:spPr/>
+        <p:txBody>
+          <a:bodyPr/>
+          <a:lstStyle/>
+          <a:p>
+            <a:r>
+              <a:rPr lang="ko-KR" altLang="en-US" dirty="0"/>
+              <a:t>해석 결과 비교</a:t>
+            </a:r>
+          </a:p>
+        </p:txBody>
+      </p:sp>
+      <p:grpSp>
+        <p:nvGrpSpPr>
+          <p:cNvPr id="24" name="그룹 23">
+            <a:extLst>
+              <a:ext uri="{FF2B5EF4-FFF2-40B4-BE49-F238E27FC236}">
+                <a16:creationId xmlns:a16="http://schemas.microsoft.com/office/drawing/2014/main" id="{2818F0D8-FEBD-F861-506B-D6E5A62C035D}"/>
+              </a:ext>
+            </a:extLst>
+          </p:cNvPr>
+          <p:cNvGrpSpPr/>
+          <p:nvPr/>
+        </p:nvGrpSpPr>
+        <p:grpSpPr>
+          <a:xfrm>
+            <a:off x="193363" y="1682984"/>
+            <a:ext cx="2369207" cy="3217179"/>
+            <a:chOff x="193363" y="1682984"/>
+            <a:chExt cx="2369207" cy="3217179"/>
+          </a:xfrm>
+        </p:grpSpPr>
+        <p:grpSp>
+          <p:nvGrpSpPr>
+            <p:cNvPr id="10" name="그룹 9">
+              <a:extLst>
+                <a:ext uri="{FF2B5EF4-FFF2-40B4-BE49-F238E27FC236}">
+                  <a16:creationId xmlns:a16="http://schemas.microsoft.com/office/drawing/2014/main" id="{DD294E33-645E-3923-0D10-56E054CC29CA}"/>
+                </a:ext>
+              </a:extLst>
+            </p:cNvPr>
+            <p:cNvGrpSpPr/>
+            <p:nvPr/>
+          </p:nvGrpSpPr>
+          <p:grpSpPr>
+            <a:xfrm>
+              <a:off x="193363" y="1682984"/>
+              <a:ext cx="2369207" cy="2950206"/>
+              <a:chOff x="317432" y="3010103"/>
+              <a:chExt cx="2369207" cy="2950206"/>
+            </a:xfrm>
+          </p:grpSpPr>
+          <p:pic>
+            <p:nvPicPr>
+              <p:cNvPr id="7" name="그림 6">
+                <a:extLst>
+                  <a:ext uri="{FF2B5EF4-FFF2-40B4-BE49-F238E27FC236}">
+                    <a16:creationId xmlns:a16="http://schemas.microsoft.com/office/drawing/2014/main" id="{72F35BD9-4FA0-51DE-5044-E916E4B7ADFF}"/>
+                  </a:ext>
+                </a:extLst>
+              </p:cNvPr>
+              <p:cNvPicPr>
+                <a:picLocks noChangeAspect="1"/>
+              </p:cNvPicPr>
+              <p:nvPr/>
+            </p:nvPicPr>
+            <p:blipFill>
+              <a:blip r:embed="rId2"/>
+              <a:srcRect r="29269"/>
+              <a:stretch>
+                <a:fillRect/>
+              </a:stretch>
+            </p:blipFill>
+            <p:spPr>
+              <a:xfrm>
+                <a:off x="317432" y="3010103"/>
+                <a:ext cx="2369207" cy="2950206"/>
+              </a:xfrm>
+              <a:prstGeom prst="rect">
+                <a:avLst/>
+              </a:prstGeom>
+            </p:spPr>
+          </p:pic>
+          <p:pic>
+            <p:nvPicPr>
+              <p:cNvPr id="9" name="그림 8">
+                <a:extLst>
+                  <a:ext uri="{FF2B5EF4-FFF2-40B4-BE49-F238E27FC236}">
+                    <a16:creationId xmlns:a16="http://schemas.microsoft.com/office/drawing/2014/main" id="{8E92C95F-BCBD-1049-CF18-79C04B496889}"/>
+                  </a:ext>
+                </a:extLst>
+              </p:cNvPr>
+              <p:cNvPicPr>
+                <a:picLocks noChangeAspect="1"/>
+              </p:cNvPicPr>
+              <p:nvPr/>
+            </p:nvPicPr>
+            <p:blipFill>
+              <a:blip r:embed="rId2"/>
+              <a:srcRect l="84181" t="61581"/>
+              <a:stretch>
+                <a:fillRect/>
+              </a:stretch>
+            </p:blipFill>
+            <p:spPr>
+              <a:xfrm>
+                <a:off x="2125588" y="4760141"/>
+                <a:ext cx="561051" cy="1200168"/>
+              </a:xfrm>
+              <a:prstGeom prst="rect">
+                <a:avLst/>
+              </a:prstGeom>
+            </p:spPr>
+          </p:pic>
+        </p:grpSp>
+        <p:sp>
+          <p:nvSpPr>
+            <p:cNvPr id="20" name="TextBox 19">
+              <a:extLst>
+                <a:ext uri="{FF2B5EF4-FFF2-40B4-BE49-F238E27FC236}">
+                  <a16:creationId xmlns:a16="http://schemas.microsoft.com/office/drawing/2014/main" id="{32D2CD80-412D-BA60-81EF-0F8DFBBA482F}"/>
+                </a:ext>
+              </a:extLst>
+            </p:cNvPr>
+            <p:cNvSpPr txBox="1"/>
+            <p:nvPr/>
+          </p:nvSpPr>
+          <p:spPr>
+            <a:xfrm>
+              <a:off x="659876" y="4669331"/>
+              <a:ext cx="1902694" cy="230832"/>
+            </a:xfrm>
+            <a:prstGeom prst="rect">
+              <a:avLst/>
+            </a:prstGeom>
+            <a:noFill/>
+          </p:spPr>
+          <p:txBody>
+            <a:bodyPr wrap="square" rtlCol="0">
+              <a:spAutoFit/>
+            </a:bodyPr>
+            <a:lstStyle/>
+            <a:p>
+              <a:r>
+                <a:rPr lang="en-US" altLang="ko-KR" sz="900" dirty="0">
+                  <a:solidFill>
+                    <a:schemeClr val="tx1">
+                      <a:lumMod val="50000"/>
+                      <a:lumOff val="50000"/>
+                    </a:schemeClr>
+                  </a:solidFill>
+                </a:rPr>
+                <a:t>Fig. 7 NACA 0012</a:t>
+              </a:r>
+              <a:r>
+                <a:rPr lang="ko-KR" altLang="en-US" sz="900" dirty="0">
+                  <a:solidFill>
+                    <a:schemeClr val="tx1">
+                      <a:lumMod val="50000"/>
+                      <a:lumOff val="50000"/>
+                    </a:schemeClr>
+                  </a:solidFill>
+                </a:rPr>
+                <a:t> </a:t>
+              </a:r>
+              <a:r>
+                <a:rPr lang="en-US" altLang="ko-KR" sz="900" dirty="0">
+                  <a:solidFill>
+                    <a:schemeClr val="tx1">
+                      <a:lumMod val="50000"/>
+                      <a:lumOff val="50000"/>
+                    </a:schemeClr>
+                  </a:solidFill>
+                </a:rPr>
+                <a:t>_ First attempt</a:t>
+              </a:r>
+              <a:endParaRPr lang="ko-KR" altLang="en-US" sz="900" dirty="0">
+                <a:solidFill>
+                  <a:schemeClr val="tx1">
+                    <a:lumMod val="50000"/>
+                    <a:lumOff val="50000"/>
+                  </a:schemeClr>
+                </a:solidFill>
+              </a:endParaRPr>
+            </a:p>
+          </p:txBody>
+        </p:sp>
+      </p:grpSp>
+      <p:grpSp>
+        <p:nvGrpSpPr>
+          <p:cNvPr id="28" name="그룹 27">
+            <a:extLst>
+              <a:ext uri="{FF2B5EF4-FFF2-40B4-BE49-F238E27FC236}">
+                <a16:creationId xmlns:a16="http://schemas.microsoft.com/office/drawing/2014/main" id="{46A3D4BD-13E9-9895-0CB0-24F5E361D102}"/>
+              </a:ext>
+            </a:extLst>
+          </p:cNvPr>
+          <p:cNvGrpSpPr/>
+          <p:nvPr/>
+        </p:nvGrpSpPr>
+        <p:grpSpPr>
+          <a:xfrm>
+            <a:off x="3752177" y="976567"/>
+            <a:ext cx="2047982" cy="2412352"/>
+            <a:chOff x="3752177" y="976567"/>
+            <a:chExt cx="2047982" cy="2412352"/>
+          </a:xfrm>
+        </p:grpSpPr>
+        <p:grpSp>
+          <p:nvGrpSpPr>
+            <p:cNvPr id="15" name="그룹 14">
+              <a:extLst>
+                <a:ext uri="{FF2B5EF4-FFF2-40B4-BE49-F238E27FC236}">
+                  <a16:creationId xmlns:a16="http://schemas.microsoft.com/office/drawing/2014/main" id="{A40F7046-0C28-3395-3842-E5BFF77D3BF4}"/>
+                </a:ext>
+              </a:extLst>
+            </p:cNvPr>
+            <p:cNvGrpSpPr/>
+            <p:nvPr/>
+          </p:nvGrpSpPr>
+          <p:grpSpPr>
+            <a:xfrm>
+              <a:off x="3752177" y="976567"/>
+              <a:ext cx="1967004" cy="2181520"/>
+              <a:chOff x="4296683" y="1325359"/>
+              <a:chExt cx="1967004" cy="2181520"/>
+            </a:xfrm>
+          </p:grpSpPr>
+          <p:pic>
+            <p:nvPicPr>
+              <p:cNvPr id="12" name="그림 11">
+                <a:extLst>
+                  <a:ext uri="{FF2B5EF4-FFF2-40B4-BE49-F238E27FC236}">
+                    <a16:creationId xmlns:a16="http://schemas.microsoft.com/office/drawing/2014/main" id="{5B6F51FF-E7B4-E600-3D50-6A8656941669}"/>
+                  </a:ext>
+                </a:extLst>
+              </p:cNvPr>
+              <p:cNvPicPr>
+                <a:picLocks noChangeAspect="1"/>
+              </p:cNvPicPr>
+              <p:nvPr/>
+            </p:nvPicPr>
+            <p:blipFill>
+              <a:blip r:embed="rId3"/>
+              <a:stretch>
+                <a:fillRect/>
+              </a:stretch>
+            </p:blipFill>
+            <p:spPr>
+              <a:xfrm>
+                <a:off x="4296683" y="1325359"/>
+                <a:ext cx="1967004" cy="2181520"/>
+              </a:xfrm>
+              <a:prstGeom prst="rect">
+                <a:avLst/>
+              </a:prstGeom>
+            </p:spPr>
+          </p:pic>
+          <p:pic>
+            <p:nvPicPr>
+              <p:cNvPr id="14" name="그림 13">
+                <a:extLst>
+                  <a:ext uri="{FF2B5EF4-FFF2-40B4-BE49-F238E27FC236}">
+                    <a16:creationId xmlns:a16="http://schemas.microsoft.com/office/drawing/2014/main" id="{3DB25B8C-5510-2138-B2FE-18BE88DD0683}"/>
+                  </a:ext>
+                </a:extLst>
+              </p:cNvPr>
+              <p:cNvPicPr>
+                <a:picLocks noChangeAspect="1"/>
+              </p:cNvPicPr>
+              <p:nvPr/>
+            </p:nvPicPr>
+            <p:blipFill>
+              <a:blip r:embed="rId4"/>
+              <a:stretch>
+                <a:fillRect/>
+              </a:stretch>
+            </p:blipFill>
+            <p:spPr>
+              <a:xfrm>
+                <a:off x="5988886" y="2894029"/>
+                <a:ext cx="274801" cy="612850"/>
+              </a:xfrm>
+              <a:prstGeom prst="rect">
+                <a:avLst/>
+              </a:prstGeom>
+            </p:spPr>
+          </p:pic>
+        </p:grpSp>
+        <p:sp>
+          <p:nvSpPr>
+            <p:cNvPr id="21" name="TextBox 20">
+              <a:extLst>
+                <a:ext uri="{FF2B5EF4-FFF2-40B4-BE49-F238E27FC236}">
+                  <a16:creationId xmlns:a16="http://schemas.microsoft.com/office/drawing/2014/main" id="{BBA89B83-81AB-5347-7163-7E42B2AD680E}"/>
+                </a:ext>
+              </a:extLst>
+            </p:cNvPr>
+            <p:cNvSpPr txBox="1"/>
+            <p:nvPr/>
+          </p:nvSpPr>
+          <p:spPr>
+            <a:xfrm>
+              <a:off x="4392891" y="3158087"/>
+              <a:ext cx="1407268" cy="230832"/>
+            </a:xfrm>
+            <a:prstGeom prst="rect">
+              <a:avLst/>
+            </a:prstGeom>
+            <a:noFill/>
+          </p:spPr>
+          <p:txBody>
+            <a:bodyPr wrap="square" rtlCol="0">
+              <a:spAutoFit/>
+            </a:bodyPr>
+            <a:lstStyle/>
+            <a:p>
+              <a:r>
+                <a:rPr lang="en-US" altLang="ko-KR" sz="900" dirty="0">
+                  <a:solidFill>
+                    <a:schemeClr val="tx1">
+                      <a:lumMod val="50000"/>
+                      <a:lumOff val="50000"/>
+                    </a:schemeClr>
+                  </a:solidFill>
+                </a:rPr>
+                <a:t>Fig. 8 basic</a:t>
+              </a:r>
+              <a:r>
+                <a:rPr lang="ko-KR" altLang="en-US" sz="900" dirty="0">
+                  <a:solidFill>
+                    <a:schemeClr val="tx1">
+                      <a:lumMod val="50000"/>
+                      <a:lumOff val="50000"/>
+                    </a:schemeClr>
+                  </a:solidFill>
+                </a:rPr>
+                <a:t> </a:t>
+              </a:r>
+              <a:r>
+                <a:rPr lang="en-US" altLang="ko-KR" sz="900" dirty="0">
+                  <a:solidFill>
+                    <a:schemeClr val="tx1">
+                      <a:lumMod val="50000"/>
+                      <a:lumOff val="50000"/>
+                    </a:schemeClr>
+                  </a:solidFill>
+                </a:rPr>
+                <a:t>- optimized</a:t>
+              </a:r>
+              <a:endParaRPr lang="ko-KR" altLang="en-US" sz="900" dirty="0">
+                <a:solidFill>
+                  <a:schemeClr val="tx1">
+                    <a:lumMod val="50000"/>
+                    <a:lumOff val="50000"/>
+                  </a:schemeClr>
+                </a:solidFill>
+              </a:endParaRPr>
+            </a:p>
+          </p:txBody>
+        </p:sp>
+      </p:grpSp>
+      <p:grpSp>
+        <p:nvGrpSpPr>
+          <p:cNvPr id="29" name="그룹 28">
+            <a:extLst>
+              <a:ext uri="{FF2B5EF4-FFF2-40B4-BE49-F238E27FC236}">
+                <a16:creationId xmlns:a16="http://schemas.microsoft.com/office/drawing/2014/main" id="{F36F1656-10FA-2773-297A-0D9551A740A7}"/>
+              </a:ext>
+            </a:extLst>
+          </p:cNvPr>
+          <p:cNvGrpSpPr/>
+          <p:nvPr/>
+        </p:nvGrpSpPr>
+        <p:grpSpPr>
+          <a:xfrm>
+            <a:off x="3798190" y="3795234"/>
+            <a:ext cx="2083153" cy="2623256"/>
+            <a:chOff x="3798190" y="3795234"/>
+            <a:chExt cx="2083153" cy="2623256"/>
+          </a:xfrm>
+        </p:grpSpPr>
+        <p:grpSp>
+          <p:nvGrpSpPr>
+            <p:cNvPr id="23" name="그룹 22">
+              <a:extLst>
+                <a:ext uri="{FF2B5EF4-FFF2-40B4-BE49-F238E27FC236}">
+                  <a16:creationId xmlns:a16="http://schemas.microsoft.com/office/drawing/2014/main" id="{BE1589C0-2658-F571-0C98-0FBE68006990}"/>
+                </a:ext>
+              </a:extLst>
+            </p:cNvPr>
+            <p:cNvGrpSpPr/>
+            <p:nvPr/>
+          </p:nvGrpSpPr>
+          <p:grpSpPr>
+            <a:xfrm>
+              <a:off x="3798190" y="3795234"/>
+              <a:ext cx="2001970" cy="2392424"/>
+              <a:chOff x="3798190" y="3795234"/>
+              <a:chExt cx="2001970" cy="2392424"/>
+            </a:xfrm>
+          </p:grpSpPr>
+          <p:pic>
+            <p:nvPicPr>
+              <p:cNvPr id="17" name="그림 16">
+                <a:extLst>
+                  <a:ext uri="{FF2B5EF4-FFF2-40B4-BE49-F238E27FC236}">
+                    <a16:creationId xmlns:a16="http://schemas.microsoft.com/office/drawing/2014/main" id="{EBD561CD-2F1C-5ED0-DA73-AE5E0F93B4AB}"/>
+                  </a:ext>
+                </a:extLst>
+              </p:cNvPr>
+              <p:cNvPicPr>
+                <a:picLocks noChangeAspect="1"/>
+              </p:cNvPicPr>
+              <p:nvPr/>
+            </p:nvPicPr>
+            <p:blipFill>
+              <a:blip r:embed="rId5"/>
+              <a:stretch>
+                <a:fillRect/>
+              </a:stretch>
+            </p:blipFill>
+            <p:spPr>
+              <a:xfrm>
+                <a:off x="3798190" y="3795234"/>
+                <a:ext cx="2001970" cy="2392424"/>
+              </a:xfrm>
+              <a:prstGeom prst="rect">
+                <a:avLst/>
+              </a:prstGeom>
+            </p:spPr>
+          </p:pic>
+          <p:pic>
+            <p:nvPicPr>
+              <p:cNvPr id="19" name="그림 18">
+                <a:extLst>
+                  <a:ext uri="{FF2B5EF4-FFF2-40B4-BE49-F238E27FC236}">
+                    <a16:creationId xmlns:a16="http://schemas.microsoft.com/office/drawing/2014/main" id="{9D924810-BB65-BD37-3ED4-1B26D7699F6D}"/>
+                  </a:ext>
+                </a:extLst>
+              </p:cNvPr>
+              <p:cNvPicPr>
+                <a:picLocks noChangeAspect="1"/>
+              </p:cNvPicPr>
+              <p:nvPr/>
+            </p:nvPicPr>
+            <p:blipFill>
+              <a:blip r:embed="rId6"/>
+              <a:stretch>
+                <a:fillRect/>
+              </a:stretch>
+            </p:blipFill>
+            <p:spPr>
+              <a:xfrm>
+                <a:off x="5407030" y="3876565"/>
+                <a:ext cx="349499" cy="792766"/>
+              </a:xfrm>
+              <a:prstGeom prst="rect">
+                <a:avLst/>
+              </a:prstGeom>
+            </p:spPr>
+          </p:pic>
+        </p:grpSp>
+        <mc:AlternateContent xmlns:mc="http://schemas.openxmlformats.org/markup-compatibility/2006">
+          <mc:Choice xmlns:a14="http://schemas.microsoft.com/office/drawing/2010/main" Requires="a14">
+            <p:sp>
+              <p:nvSpPr>
+                <p:cNvPr id="22" name="TextBox 21">
+                  <a:extLst>
+                    <a:ext uri="{FF2B5EF4-FFF2-40B4-BE49-F238E27FC236}">
+                      <a16:creationId xmlns:a16="http://schemas.microsoft.com/office/drawing/2014/main" id="{852308D0-A8D6-9EDC-727C-0E0EE5456A86}"/>
+                    </a:ext>
+                  </a:extLst>
+                </p:cNvPr>
+                <p:cNvSpPr txBox="1"/>
+                <p:nvPr/>
+              </p:nvSpPr>
+              <p:spPr>
+                <a:xfrm>
+                  <a:off x="4251489" y="6187658"/>
+                  <a:ext cx="1629854" cy="230832"/>
+                </a:xfrm>
+                <a:prstGeom prst="rect">
+                  <a:avLst/>
+                </a:prstGeom>
+                <a:noFill/>
+              </p:spPr>
+              <p:txBody>
+                <a:bodyPr wrap="square" rtlCol="0">
+                  <a:spAutoFit/>
+                </a:bodyPr>
+                <a:lstStyle/>
+                <a:p>
+                  <a:r>
+                    <a:rPr lang="en-US" altLang="ko-KR" sz="900" dirty="0">
+                      <a:solidFill>
+                        <a:schemeClr val="tx1">
+                          <a:lumMod val="50000"/>
+                          <a:lumOff val="50000"/>
+                        </a:schemeClr>
+                      </a:solidFill>
+                    </a:rPr>
+                    <a:t>Fig. 9 </a:t>
+                  </a:r>
+                  <a14:m>
+                    <m:oMath xmlns:m="http://schemas.openxmlformats.org/officeDocument/2006/math">
+                      <m:sSub>
+                        <m:sSubPr>
+                          <m:ctrlPr>
+                            <a:rPr lang="en-US" altLang="ko-KR" sz="900" i="1">
+                              <a:solidFill>
+                                <a:schemeClr val="tx1">
+                                  <a:lumMod val="50000"/>
+                                  <a:lumOff val="50000"/>
+                                </a:schemeClr>
+                              </a:solidFill>
+                              <a:latin typeface="Cambria Math" panose="02040503050406030204" pitchFamily="18" charset="0"/>
+                            </a:rPr>
+                          </m:ctrlPr>
+                        </m:sSubPr>
+                        <m:e>
+                          <m:r>
+                            <a:rPr lang="en-US" altLang="ko-KR" sz="900" i="1">
+                              <a:solidFill>
+                                <a:schemeClr val="tx1">
+                                  <a:lumMod val="50000"/>
+                                  <a:lumOff val="50000"/>
+                                </a:schemeClr>
+                              </a:solidFill>
+                              <a:latin typeface="Cambria Math" panose="02040503050406030204" pitchFamily="18" charset="0"/>
+                            </a:rPr>
+                            <m:t>𝑪</m:t>
+                          </m:r>
+                        </m:e>
+                        <m:sub>
+                          <m:r>
+                            <a:rPr lang="en-US" altLang="ko-KR" sz="900" i="1">
+                              <a:solidFill>
+                                <a:schemeClr val="tx1">
+                                  <a:lumMod val="50000"/>
+                                  <a:lumOff val="50000"/>
+                                </a:schemeClr>
+                              </a:solidFill>
+                              <a:latin typeface="Cambria Math" panose="02040503050406030204" pitchFamily="18" charset="0"/>
+                            </a:rPr>
+                            <m:t>𝑳</m:t>
+                          </m:r>
+                        </m:sub>
+                      </m:sSub>
+                    </m:oMath>
+                  </a14:m>
+                  <a:r>
+                    <a:rPr lang="ko-KR" altLang="en-US" sz="900" dirty="0">
+                      <a:solidFill>
+                        <a:schemeClr val="tx1">
+                          <a:lumMod val="50000"/>
+                          <a:lumOff val="50000"/>
+                        </a:schemeClr>
+                      </a:solidFill>
+                    </a:rPr>
+                    <a:t> </a:t>
+                  </a:r>
+                  <a:r>
+                    <a:rPr lang="en-US" altLang="ko-KR" sz="900" dirty="0">
+                      <a:solidFill>
+                        <a:schemeClr val="tx1">
+                          <a:lumMod val="50000"/>
+                          <a:lumOff val="50000"/>
+                        </a:schemeClr>
+                      </a:solidFill>
+                    </a:rPr>
+                    <a:t>target - optimized</a:t>
+                  </a:r>
+                  <a:endParaRPr lang="ko-KR" altLang="en-US" sz="900" dirty="0">
+                    <a:solidFill>
+                      <a:schemeClr val="tx1">
+                        <a:lumMod val="50000"/>
+                        <a:lumOff val="50000"/>
+                      </a:schemeClr>
+                    </a:solidFill>
+                  </a:endParaRPr>
+                </a:p>
+              </p:txBody>
+            </p:sp>
+          </mc:Choice>
+          <mc:Fallback>
+            <p:sp>
+              <p:nvSpPr>
+                <p:cNvPr id="22" name="TextBox 21">
+                  <a:extLst>
+                    <a:ext uri="{FF2B5EF4-FFF2-40B4-BE49-F238E27FC236}">
+                      <a16:creationId xmlns:a16="http://schemas.microsoft.com/office/drawing/2014/main" id="{852308D0-A8D6-9EDC-727C-0E0EE5456A86}"/>
+                    </a:ext>
+                  </a:extLst>
+                </p:cNvPr>
+                <p:cNvSpPr txBox="1">
+                  <a:spLocks noRot="1" noChangeAspect="1" noMove="1" noResize="1" noEditPoints="1" noAdjustHandles="1" noChangeArrowheads="1" noChangeShapeType="1" noTextEdit="1"/>
+                </p:cNvSpPr>
+                <p:nvPr/>
+              </p:nvSpPr>
+              <p:spPr>
+                <a:xfrm>
+                  <a:off x="4251489" y="6187658"/>
+                  <a:ext cx="1629854" cy="230832"/>
+                </a:xfrm>
+                <a:prstGeom prst="rect">
+                  <a:avLst/>
+                </a:prstGeom>
+                <a:blipFill>
+                  <a:blip r:embed="rId7"/>
+                  <a:stretch>
+                    <a:fillRect b="-10526"/>
+                  </a:stretch>
+                </a:blipFill>
+              </p:spPr>
+              <p:txBody>
+                <a:bodyPr/>
+                <a:lstStyle/>
+                <a:p>
+                  <a:r>
+                    <a:rPr lang="ko-KR" altLang="en-US">
+                      <a:noFill/>
+                    </a:rPr>
+                    <a:t> </a:t>
+                  </a:r>
+                </a:p>
+              </p:txBody>
+            </p:sp>
+          </mc:Fallback>
+        </mc:AlternateContent>
+      </p:grpSp>
+      <mc:AlternateContent xmlns:mc="http://schemas.openxmlformats.org/markup-compatibility/2006">
+        <mc:Choice xmlns:a14="http://schemas.microsoft.com/office/drawing/2010/main" Requires="a14">
+          <p:sp>
+            <p:nvSpPr>
+              <p:cNvPr id="25" name="TextBox 24">
+                <a:extLst>
+                  <a:ext uri="{FF2B5EF4-FFF2-40B4-BE49-F238E27FC236}">
+                    <a16:creationId xmlns:a16="http://schemas.microsoft.com/office/drawing/2014/main" id="{C7C5AEED-0274-B5D3-784F-2B2B1A4089DE}"/>
+                  </a:ext>
+                </a:extLst>
+              </p:cNvPr>
+              <p:cNvSpPr txBox="1"/>
+              <p:nvPr/>
+            </p:nvSpPr>
+            <p:spPr>
+              <a:xfrm>
+                <a:off x="5800159" y="1102145"/>
+                <a:ext cx="5816816" cy="1619098"/>
+              </a:xfrm>
+              <a:prstGeom prst="rect">
+                <a:avLst/>
+              </a:prstGeom>
+              <a:noFill/>
+            </p:spPr>
+            <p:txBody>
+              <a:bodyPr wrap="square" rtlCol="0">
+                <a:spAutoFit/>
+              </a:bodyPr>
+              <a:lstStyle/>
+              <a:p>
+                <a:r>
+                  <a:rPr lang="en-US" altLang="ko-KR" sz="1200" dirty="0">
+                    <a:solidFill>
+                      <a:schemeClr val="tx1"/>
+                    </a:solidFill>
+                  </a:rPr>
+                  <a:t>Basic </a:t>
+                </a:r>
+                <a:r>
+                  <a:rPr lang="ko-KR" altLang="en-US" sz="1200" dirty="0">
+                    <a:solidFill>
+                      <a:schemeClr val="tx1"/>
+                    </a:solidFill>
+                  </a:rPr>
+                  <a:t>설정으로 수행한 해석 결과는 </a:t>
+                </a:r>
+                <a:r>
+                  <a:rPr lang="en-US" altLang="ko-KR" sz="1200" dirty="0">
+                    <a:solidFill>
+                      <a:schemeClr val="tx1"/>
+                    </a:solidFill>
+                  </a:rPr>
+                  <a:t>Fig. 2</a:t>
+                </a:r>
+                <a:r>
+                  <a:rPr lang="ko-KR" altLang="en-US" sz="1200" dirty="0">
+                    <a:solidFill>
+                      <a:schemeClr val="tx1"/>
+                    </a:solidFill>
+                  </a:rPr>
+                  <a:t>의 압력 계수 분포와 정성적으로 매우   유사한 </a:t>
+                </a:r>
+                <a:r>
+                  <a:rPr lang="ko-KR" altLang="en-US" sz="1200" dirty="0" err="1">
+                    <a:solidFill>
+                      <a:schemeClr val="tx1"/>
+                    </a:solidFill>
+                  </a:rPr>
+                  <a:t>압력장</a:t>
+                </a:r>
+                <a:r>
+                  <a:rPr lang="ko-KR" altLang="en-US" sz="1200" dirty="0">
+                    <a:solidFill>
+                      <a:schemeClr val="tx1"/>
+                    </a:solidFill>
+                  </a:rPr>
+                  <a:t> 개형을 보여준다</a:t>
+                </a:r>
+                <a:r>
+                  <a:rPr lang="en-US" altLang="ko-KR" sz="1200" dirty="0">
+                    <a:solidFill>
+                      <a:schemeClr val="tx1"/>
+                    </a:solidFill>
+                  </a:rPr>
+                  <a:t>. </a:t>
+                </a:r>
+                <a:r>
+                  <a:rPr lang="ko-KR" altLang="en-US" sz="1200" dirty="0" err="1">
+                    <a:solidFill>
+                      <a:schemeClr val="tx1"/>
+                    </a:solidFill>
+                  </a:rPr>
+                  <a:t>익형</a:t>
+                </a:r>
+                <a:r>
+                  <a:rPr lang="ko-KR" altLang="en-US" sz="1200" dirty="0">
+                    <a:solidFill>
+                      <a:schemeClr val="tx1"/>
+                    </a:solidFill>
+                  </a:rPr>
+                  <a:t> 상부의 저압 영역 형성</a:t>
+                </a:r>
+                <a:r>
+                  <a:rPr lang="en-US" altLang="ko-KR" sz="1200" dirty="0">
+                    <a:solidFill>
+                      <a:schemeClr val="tx1"/>
+                    </a:solidFill>
+                  </a:rPr>
+                  <a:t>, </a:t>
+                </a:r>
+                <a:r>
+                  <a:rPr lang="ko-KR" altLang="en-US" sz="1200" dirty="0">
+                    <a:solidFill>
+                      <a:schemeClr val="tx1"/>
+                    </a:solidFill>
+                  </a:rPr>
+                  <a:t>후류 방향으로의   압력 </a:t>
+                </a:r>
+                <a:r>
+                  <a:rPr lang="ko-KR" altLang="en-US" sz="1200" dirty="0" err="1">
+                    <a:solidFill>
+                      <a:schemeClr val="tx1"/>
+                    </a:solidFill>
+                  </a:rPr>
+                  <a:t>구배</a:t>
+                </a:r>
+                <a:r>
+                  <a:rPr lang="en-US" altLang="ko-KR" sz="1200" dirty="0">
+                    <a:solidFill>
+                      <a:schemeClr val="tx1"/>
+                    </a:solidFill>
+                  </a:rPr>
+                  <a:t>, </a:t>
+                </a:r>
+                <a:r>
+                  <a:rPr lang="ko-KR" altLang="en-US" sz="1200" dirty="0">
+                    <a:solidFill>
+                      <a:schemeClr val="tx1"/>
+                    </a:solidFill>
+                  </a:rPr>
+                  <a:t>그리고 </a:t>
+                </a:r>
+                <a:r>
+                  <a:rPr lang="ko-KR" altLang="en-US" sz="1200" dirty="0" err="1">
+                    <a:solidFill>
+                      <a:schemeClr val="tx1"/>
+                    </a:solidFill>
+                  </a:rPr>
+                  <a:t>후연부에서의</a:t>
+                </a:r>
+                <a:r>
+                  <a:rPr lang="ko-KR" altLang="en-US" sz="1200" dirty="0">
+                    <a:solidFill>
+                      <a:schemeClr val="tx1"/>
+                    </a:solidFill>
+                  </a:rPr>
+                  <a:t> 압력 회복 양상 등 주요 유동 특성이 </a:t>
+                </a:r>
+                <a14:m>
+                  <m:oMath xmlns:m="http://schemas.openxmlformats.org/officeDocument/2006/math">
+                    <m:sSub>
+                      <m:sSubPr>
+                        <m:ctrlPr>
+                          <a:rPr lang="en-US" altLang="ko-KR" sz="1200" i="1">
+                            <a:solidFill>
+                              <a:schemeClr val="tx1"/>
+                            </a:solidFill>
+                            <a:latin typeface="Cambria Math" panose="02040503050406030204" pitchFamily="18" charset="0"/>
+                          </a:rPr>
+                        </m:ctrlPr>
+                      </m:sSubPr>
+                      <m:e>
+                        <m:r>
+                          <a:rPr lang="en-US" altLang="ko-KR" sz="1200" i="1">
+                            <a:solidFill>
+                              <a:schemeClr val="tx1"/>
+                            </a:solidFill>
+                            <a:latin typeface="Cambria Math" panose="02040503050406030204" pitchFamily="18" charset="0"/>
+                          </a:rPr>
+                          <m:t>𝑪</m:t>
+                        </m:r>
+                      </m:e>
+                      <m:sub>
+                        <m:r>
+                          <a:rPr lang="en-US" altLang="ko-KR" sz="1200" b="0" i="1" smtClean="0">
+                            <a:solidFill>
+                              <a:schemeClr val="tx1"/>
+                            </a:solidFill>
+                            <a:latin typeface="Cambria Math" panose="02040503050406030204" pitchFamily="18" charset="0"/>
+                          </a:rPr>
+                          <m:t>𝑃</m:t>
+                        </m:r>
+                      </m:sub>
+                    </m:sSub>
+                  </m:oMath>
+                </a14:m>
+                <a:r>
+                  <a:rPr lang="en-US" altLang="ko-KR" sz="1200" dirty="0">
+                    <a:solidFill>
+                      <a:schemeClr val="tx1"/>
+                    </a:solidFill>
+                  </a:rPr>
+                  <a:t> </a:t>
+                </a:r>
+                <a:r>
+                  <a:rPr lang="ko-KR" altLang="en-US" sz="1200" dirty="0">
+                    <a:solidFill>
+                      <a:schemeClr val="tx1"/>
+                    </a:solidFill>
+                  </a:rPr>
+                  <a:t>그래프에서 확인된 경향과 일치한다</a:t>
+                </a:r>
+                <a:r>
+                  <a:rPr lang="en-US" altLang="ko-KR" sz="1200" dirty="0">
+                    <a:solidFill>
+                      <a:schemeClr val="tx1"/>
+                    </a:solidFill>
+                  </a:rPr>
+                  <a:t>.</a:t>
+                </a:r>
+              </a:p>
+              <a:p>
+                <a:endParaRPr lang="en-US" altLang="ko-KR" sz="1200" dirty="0">
+                  <a:solidFill>
+                    <a:schemeClr val="tx1"/>
+                  </a:solidFill>
+                </a:endParaRPr>
+              </a:p>
+              <a:p>
+                <a:r>
+                  <a:rPr lang="ko-KR" altLang="en-US" sz="1200" dirty="0">
+                    <a:solidFill>
+                      <a:schemeClr val="tx1"/>
+                    </a:solidFill>
+                  </a:rPr>
+                  <a:t>이는 기본 입력 조건만으로도 </a:t>
+                </a:r>
+                <a:r>
+                  <a:rPr lang="ko-KR" altLang="en-US" sz="1200" dirty="0" err="1">
+                    <a:solidFill>
+                      <a:schemeClr val="tx1"/>
+                    </a:solidFill>
+                  </a:rPr>
+                  <a:t>익형</a:t>
+                </a:r>
+                <a:r>
+                  <a:rPr lang="ko-KR" altLang="en-US" sz="1200" dirty="0">
+                    <a:solidFill>
+                      <a:schemeClr val="tx1"/>
+                    </a:solidFill>
+                  </a:rPr>
+                  <a:t> 주위의 전반적인 압력 분포와 유동 구조가     안정적으로 재현되고 있음을 의미하며</a:t>
+                </a:r>
+                <a:r>
+                  <a:rPr lang="en-US" altLang="ko-KR" sz="1200" dirty="0">
+                    <a:solidFill>
+                      <a:schemeClr val="tx1"/>
+                    </a:solidFill>
+                  </a:rPr>
+                  <a:t>, </a:t>
+                </a:r>
+                <a:r>
+                  <a:rPr lang="ko-KR" altLang="en-US" sz="1200" dirty="0">
+                    <a:solidFill>
+                      <a:schemeClr val="tx1"/>
+                    </a:solidFill>
+                  </a:rPr>
+                  <a:t>이후 조건 변화나 최적화 문제를 다룰 때 기준 해석으로 활용하기에 충분한 신뢰성을 제공한다</a:t>
+                </a:r>
+                <a:r>
+                  <a:rPr lang="en-US" altLang="ko-KR" sz="1200" dirty="0">
+                    <a:solidFill>
+                      <a:schemeClr val="tx1"/>
+                    </a:solidFill>
+                  </a:rPr>
+                  <a:t>.</a:t>
+                </a:r>
+                <a:endParaRPr lang="ko-KR" altLang="en-US" sz="1200" dirty="0">
+                  <a:solidFill>
+                    <a:schemeClr val="tx1"/>
+                  </a:solidFill>
+                </a:endParaRPr>
+              </a:p>
+            </p:txBody>
+          </p:sp>
+        </mc:Choice>
+        <mc:Fallback>
+          <p:sp>
+            <p:nvSpPr>
+              <p:cNvPr id="25" name="TextBox 24">
+                <a:extLst>
+                  <a:ext uri="{FF2B5EF4-FFF2-40B4-BE49-F238E27FC236}">
+                    <a16:creationId xmlns:a16="http://schemas.microsoft.com/office/drawing/2014/main" id="{C7C5AEED-0274-B5D3-784F-2B2B1A4089DE}"/>
+                  </a:ext>
+                </a:extLst>
+              </p:cNvPr>
+              <p:cNvSpPr txBox="1">
+                <a:spLocks noRot="1" noChangeAspect="1" noMove="1" noResize="1" noEditPoints="1" noAdjustHandles="1" noChangeArrowheads="1" noChangeShapeType="1" noTextEdit="1"/>
+              </p:cNvSpPr>
+              <p:nvPr/>
+            </p:nvSpPr>
+            <p:spPr>
+              <a:xfrm>
+                <a:off x="5800159" y="1102145"/>
+                <a:ext cx="5816816" cy="1619098"/>
+              </a:xfrm>
+              <a:prstGeom prst="rect">
+                <a:avLst/>
+              </a:prstGeom>
+              <a:blipFill>
+                <a:blip r:embed="rId8"/>
+                <a:stretch>
+                  <a:fillRect t="-377"/>
+                </a:stretch>
+              </a:blipFill>
+            </p:spPr>
+            <p:txBody>
+              <a:bodyPr/>
+              <a:lstStyle/>
+              <a:p>
+                <a:r>
+                  <a:rPr lang="ko-KR" altLang="en-US">
+                    <a:noFill/>
+                  </a:rPr>
+                  <a:t> </a:t>
+                </a:r>
+              </a:p>
+            </p:txBody>
+          </p:sp>
+        </mc:Fallback>
+      </mc:AlternateContent>
+      <p:sp>
+        <p:nvSpPr>
+          <p:cNvPr id="26" name="TextBox 25">
+            <a:extLst>
+              <a:ext uri="{FF2B5EF4-FFF2-40B4-BE49-F238E27FC236}">
+                <a16:creationId xmlns:a16="http://schemas.microsoft.com/office/drawing/2014/main" id="{F3F924DA-B5B3-D088-9464-1AB23522C022}"/>
+              </a:ext>
+            </a:extLst>
+          </p:cNvPr>
+          <p:cNvSpPr txBox="1"/>
+          <p:nvPr/>
+        </p:nvSpPr>
+        <p:spPr>
+          <a:xfrm>
+            <a:off x="193363" y="645699"/>
+            <a:ext cx="7350846" cy="400110"/>
+          </a:xfrm>
+          <a:prstGeom prst="rect">
+            <a:avLst/>
+          </a:prstGeom>
+          <a:noFill/>
+        </p:spPr>
+        <p:txBody>
+          <a:bodyPr wrap="square" rtlCol="0">
+            <a:spAutoFit/>
+          </a:bodyPr>
+          <a:lstStyle/>
+          <a:p>
+            <a:pPr marL="285750" indent="-285750">
+              <a:buFont typeface="Wingdings" pitchFamily="2" charset="2"/>
+              <a:buChar char="v"/>
+            </a:pPr>
+            <a:r>
+              <a:rPr lang="ko-KR" altLang="en-US" sz="2000" dirty="0"/>
+              <a:t>해석 결과 비교</a:t>
+            </a:r>
+            <a:endParaRPr lang="en-US" sz="2000" dirty="0"/>
+          </a:p>
+        </p:txBody>
+      </p:sp>
+      <mc:AlternateContent xmlns:mc="http://schemas.openxmlformats.org/markup-compatibility/2006">
+        <mc:Choice xmlns:a14="http://schemas.microsoft.com/office/drawing/2010/main" Requires="a14">
+          <p:sp>
+            <p:nvSpPr>
+              <p:cNvPr id="27" name="TextBox 26">
+                <a:extLst>
+                  <a:ext uri="{FF2B5EF4-FFF2-40B4-BE49-F238E27FC236}">
+                    <a16:creationId xmlns:a16="http://schemas.microsoft.com/office/drawing/2014/main" id="{3F23539A-CC70-F16C-6B89-5263A2ED79D0}"/>
+                  </a:ext>
+                </a:extLst>
+              </p:cNvPr>
+              <p:cNvSpPr txBox="1"/>
+              <p:nvPr/>
+            </p:nvSpPr>
+            <p:spPr>
+              <a:xfrm>
+                <a:off x="5881342" y="3740834"/>
+                <a:ext cx="6213247" cy="2677656"/>
+              </a:xfrm>
+              <a:prstGeom prst="rect">
+                <a:avLst/>
+              </a:prstGeom>
+              <a:noFill/>
+            </p:spPr>
+            <p:txBody>
+              <a:bodyPr wrap="square" rtlCol="0">
+                <a:spAutoFit/>
+              </a:bodyPr>
+              <a:lstStyle/>
+              <a:p>
+                <a:pPr algn="just"/>
+                <a14:m>
+                  <m:oMath xmlns:m="http://schemas.openxmlformats.org/officeDocument/2006/math">
+                    <m:sSub>
+                      <m:sSubPr>
+                        <m:ctrlPr>
+                          <a:rPr lang="en-US" altLang="ko-KR" sz="1200" i="1" smtClean="0">
+                            <a:solidFill>
+                              <a:schemeClr val="tx1"/>
+                            </a:solidFill>
+                            <a:latin typeface="Cambria Math" panose="02040503050406030204" pitchFamily="18" charset="0"/>
+                          </a:rPr>
+                        </m:ctrlPr>
+                      </m:sSubPr>
+                      <m:e>
+                        <m:r>
+                          <a:rPr lang="en-US" altLang="ko-KR" sz="1200" i="1">
+                            <a:solidFill>
+                              <a:schemeClr val="tx1"/>
+                            </a:solidFill>
+                            <a:latin typeface="Cambria Math" panose="02040503050406030204" pitchFamily="18" charset="0"/>
+                          </a:rPr>
+                          <m:t>𝑪</m:t>
+                        </m:r>
+                      </m:e>
+                      <m:sub>
+                        <m:r>
+                          <a:rPr lang="en-US" altLang="ko-KR" sz="1200" i="1">
+                            <a:solidFill>
+                              <a:schemeClr val="tx1"/>
+                            </a:solidFill>
+                            <a:latin typeface="Cambria Math" panose="02040503050406030204" pitchFamily="18" charset="0"/>
+                          </a:rPr>
+                          <m:t>𝑳</m:t>
+                        </m:r>
+                      </m:sub>
+                    </m:sSub>
+                  </m:oMath>
+                </a14:m>
+                <a:r>
+                  <a:rPr lang="en-US" altLang="ko-KR" sz="1200" dirty="0">
+                    <a:solidFill>
+                      <a:schemeClr val="tx1"/>
+                    </a:solidFill>
+                  </a:rPr>
+                  <a:t> target </a:t>
+                </a:r>
+                <a:r>
+                  <a:rPr lang="ko-KR" altLang="en-US" sz="1200" dirty="0">
+                    <a:solidFill>
+                      <a:schemeClr val="tx1"/>
+                    </a:solidFill>
+                  </a:rPr>
+                  <a:t>조건을 적용한 해석에서도 전체적인 </a:t>
+                </a:r>
+                <a:r>
+                  <a:rPr lang="ko-KR" altLang="en-US" sz="1200" dirty="0" err="1">
+                    <a:solidFill>
+                      <a:schemeClr val="tx1"/>
+                    </a:solidFill>
+                  </a:rPr>
+                  <a:t>압력장</a:t>
+                </a:r>
+                <a:r>
+                  <a:rPr lang="ko-KR" altLang="en-US" sz="1200" dirty="0">
+                    <a:solidFill>
+                      <a:schemeClr val="tx1"/>
+                    </a:solidFill>
+                  </a:rPr>
+                  <a:t> 구조는 </a:t>
+                </a:r>
+                <a:r>
+                  <a:rPr lang="en-US" altLang="ko-KR" sz="1200" dirty="0">
+                    <a:solidFill>
+                      <a:schemeClr val="tx1"/>
+                    </a:solidFill>
+                  </a:rPr>
+                  <a:t>Basic case</a:t>
+                </a:r>
+                <a:r>
+                  <a:rPr lang="ko-KR" altLang="en-US" sz="1200" dirty="0">
+                    <a:solidFill>
+                      <a:schemeClr val="tx1"/>
+                    </a:solidFill>
+                  </a:rPr>
+                  <a:t>와 크게 다르지 않지만</a:t>
+                </a:r>
+                <a:r>
+                  <a:rPr lang="en-US" altLang="ko-KR" sz="1200" dirty="0">
+                    <a:solidFill>
+                      <a:schemeClr val="tx1"/>
+                    </a:solidFill>
+                  </a:rPr>
+                  <a:t>, </a:t>
+                </a:r>
+                <a:r>
+                  <a:rPr lang="ko-KR" altLang="en-US" sz="1200" dirty="0">
+                    <a:solidFill>
+                      <a:schemeClr val="tx1"/>
+                    </a:solidFill>
+                  </a:rPr>
+                  <a:t>목표 양력 계수 달성을 위한 압력 재배치로 인해 몇 가지 특징적인 변화가      나타난다</a:t>
+                </a:r>
+                <a:r>
+                  <a:rPr lang="en-US" altLang="ko-KR" sz="1200" dirty="0">
+                    <a:solidFill>
+                      <a:schemeClr val="tx1"/>
+                    </a:solidFill>
+                  </a:rPr>
+                  <a:t>.</a:t>
+                </a:r>
+              </a:p>
+              <a:p>
+                <a:pPr algn="just"/>
+                <a:endParaRPr lang="en-US" altLang="ko-KR" sz="1200" dirty="0">
+                  <a:solidFill>
+                    <a:schemeClr val="tx1"/>
+                  </a:solidFill>
+                </a:endParaRPr>
+              </a:p>
+              <a:p>
+                <a:pPr algn="just"/>
+                <a:r>
+                  <a:rPr lang="ko-KR" altLang="en-US" sz="1200" dirty="0">
+                    <a:solidFill>
+                      <a:schemeClr val="tx1"/>
+                    </a:solidFill>
+                  </a:rPr>
+                  <a:t>우선</a:t>
+                </a:r>
+                <a:r>
+                  <a:rPr lang="en-US" altLang="ko-KR" sz="1200" dirty="0">
+                    <a:solidFill>
+                      <a:schemeClr val="tx1"/>
+                    </a:solidFill>
+                  </a:rPr>
+                  <a:t>, leading-edge </a:t>
+                </a:r>
+                <a:r>
+                  <a:rPr lang="ko-KR" altLang="en-US" sz="1200" dirty="0">
+                    <a:solidFill>
+                      <a:schemeClr val="tx1"/>
+                    </a:solidFill>
+                  </a:rPr>
+                  <a:t>부근에서 </a:t>
+                </a:r>
+                <a:r>
+                  <a:rPr lang="ko-KR" altLang="en-US" sz="1200" dirty="0" err="1">
+                    <a:solidFill>
+                      <a:schemeClr val="tx1"/>
+                    </a:solidFill>
+                  </a:rPr>
+                  <a:t>조파항력이</a:t>
+                </a:r>
+                <a:r>
+                  <a:rPr lang="ko-KR" altLang="en-US" sz="1200" dirty="0">
+                    <a:solidFill>
+                      <a:schemeClr val="tx1"/>
+                    </a:solidFill>
+                  </a:rPr>
+                  <a:t> 발생하는 위치가 </a:t>
+                </a:r>
+                <a:r>
+                  <a:rPr lang="en-US" altLang="ko-KR" sz="1200" dirty="0">
+                    <a:solidFill>
+                      <a:schemeClr val="tx1"/>
+                    </a:solidFill>
+                  </a:rPr>
+                  <a:t>Basic case</a:t>
+                </a:r>
+                <a:r>
+                  <a:rPr lang="ko-KR" altLang="en-US" sz="1200" dirty="0">
+                    <a:solidFill>
+                      <a:schemeClr val="tx1"/>
+                    </a:solidFill>
+                  </a:rPr>
+                  <a:t>보다 앞쪽으로    이동하며 압력 등고선이 더 촘촘하게 분포한다</a:t>
+                </a:r>
+                <a:r>
+                  <a:rPr lang="en-US" altLang="ko-KR" sz="1200" dirty="0">
+                    <a:solidFill>
+                      <a:schemeClr val="tx1"/>
+                    </a:solidFill>
+                  </a:rPr>
+                  <a:t>. </a:t>
+                </a:r>
+                <a:r>
+                  <a:rPr lang="ko-KR" altLang="en-US" sz="1200" dirty="0">
+                    <a:solidFill>
+                      <a:schemeClr val="tx1"/>
+                    </a:solidFill>
+                  </a:rPr>
+                  <a:t>이는 상부 표면의 저압 영역을 강화하여 양력을 증가시키는 과정에서 압력 </a:t>
+                </a:r>
+                <a:r>
+                  <a:rPr lang="ko-KR" altLang="en-US" sz="1200" dirty="0" err="1">
+                    <a:solidFill>
+                      <a:schemeClr val="tx1"/>
+                    </a:solidFill>
+                  </a:rPr>
+                  <a:t>구배가</a:t>
+                </a:r>
+                <a:r>
+                  <a:rPr lang="ko-KR" altLang="en-US" sz="1200" dirty="0">
+                    <a:solidFill>
+                      <a:schemeClr val="tx1"/>
+                    </a:solidFill>
+                  </a:rPr>
+                  <a:t> 더 </a:t>
+                </a:r>
+                <a:r>
+                  <a:rPr lang="ko-KR" altLang="en-US" sz="1200" dirty="0" err="1">
+                    <a:solidFill>
+                      <a:schemeClr val="tx1"/>
+                    </a:solidFill>
+                  </a:rPr>
+                  <a:t>급격해졌기</a:t>
+                </a:r>
+                <a:r>
+                  <a:rPr lang="ko-KR" altLang="en-US" sz="1200" dirty="0">
+                    <a:solidFill>
+                      <a:schemeClr val="tx1"/>
+                    </a:solidFill>
+                  </a:rPr>
+                  <a:t> 때문이다</a:t>
+                </a:r>
+                <a:r>
+                  <a:rPr lang="en-US" altLang="ko-KR" sz="1200" dirty="0">
+                    <a:solidFill>
+                      <a:schemeClr val="tx1"/>
+                    </a:solidFill>
+                  </a:rPr>
+                  <a:t>. </a:t>
+                </a:r>
+                <a:r>
+                  <a:rPr lang="ko-KR" altLang="en-US" sz="1200" dirty="0">
+                    <a:solidFill>
+                      <a:schemeClr val="tx1"/>
+                    </a:solidFill>
+                  </a:rPr>
+                  <a:t>이와 같은 압력      분포 변화는 점성저항 및 </a:t>
+                </a:r>
+                <a:r>
+                  <a:rPr lang="ko-KR" altLang="en-US" sz="1200" dirty="0" err="1">
+                    <a:solidFill>
+                      <a:schemeClr val="tx1"/>
+                    </a:solidFill>
+                  </a:rPr>
+                  <a:t>조파항력</a:t>
+                </a:r>
+                <a:r>
+                  <a:rPr lang="ko-KR" altLang="en-US" sz="1200" dirty="0">
+                    <a:solidFill>
+                      <a:schemeClr val="tx1"/>
+                    </a:solidFill>
+                  </a:rPr>
+                  <a:t> 증가로 이어지며</a:t>
+                </a:r>
+                <a:r>
+                  <a:rPr lang="en-US" altLang="ko-KR" sz="1200" dirty="0">
+                    <a:solidFill>
+                      <a:schemeClr val="tx1"/>
+                    </a:solidFill>
+                  </a:rPr>
+                  <a:t>, </a:t>
+                </a:r>
+                <a:r>
+                  <a:rPr lang="ko-KR" altLang="en-US" sz="1200" dirty="0">
+                    <a:solidFill>
+                      <a:schemeClr val="tx1"/>
+                    </a:solidFill>
+                  </a:rPr>
+                  <a:t>실제로 </a:t>
+                </a:r>
+                <a:r>
+                  <a:rPr lang="en-US" altLang="ko-KR" sz="1200" dirty="0">
+                    <a:solidFill>
+                      <a:schemeClr val="tx1"/>
+                    </a:solidFill>
+                  </a:rPr>
+                  <a:t>Basic case</a:t>
+                </a:r>
+                <a:r>
+                  <a:rPr lang="ko-KR" altLang="en-US" sz="1200" dirty="0">
+                    <a:solidFill>
+                      <a:schemeClr val="tx1"/>
+                    </a:solidFill>
+                  </a:rPr>
+                  <a:t>와 비교했을     때 전체 항력의 증가가 뚜렷하게 나타난다</a:t>
+                </a:r>
+                <a:r>
+                  <a:rPr lang="en-US" altLang="ko-KR" sz="1200" dirty="0">
+                    <a:solidFill>
+                      <a:schemeClr val="tx1"/>
+                    </a:solidFill>
+                  </a:rPr>
+                  <a:t>.</a:t>
+                </a:r>
+              </a:p>
+              <a:p>
+                <a:pPr algn="just"/>
+                <a:endParaRPr lang="en-US" altLang="ko-KR" sz="1200" dirty="0">
+                  <a:solidFill>
+                    <a:schemeClr val="tx1"/>
+                  </a:solidFill>
+                </a:endParaRPr>
+              </a:p>
+              <a:p>
+                <a:pPr algn="just"/>
+                <a:r>
+                  <a:rPr lang="ko-KR" altLang="en-US" sz="1200" dirty="0">
+                    <a:solidFill>
+                      <a:schemeClr val="tx1"/>
+                    </a:solidFill>
+                  </a:rPr>
+                  <a:t>또한 </a:t>
+                </a:r>
+                <a:r>
+                  <a:rPr lang="en-US" altLang="ko-KR" sz="1200" dirty="0">
+                    <a:solidFill>
+                      <a:schemeClr val="tx1"/>
+                    </a:solidFill>
+                  </a:rPr>
+                  <a:t>trailing-edge </a:t>
+                </a:r>
+                <a:r>
+                  <a:rPr lang="ko-KR" altLang="en-US" sz="1200" dirty="0">
+                    <a:solidFill>
+                      <a:schemeClr val="tx1"/>
+                    </a:solidFill>
+                  </a:rPr>
+                  <a:t>주변에서는 압력 회복이 상대적으로 약해지고</a:t>
+                </a:r>
+                <a:r>
+                  <a:rPr lang="en-US" altLang="ko-KR" sz="1200" dirty="0">
+                    <a:solidFill>
+                      <a:schemeClr val="tx1"/>
+                    </a:solidFill>
+                  </a:rPr>
+                  <a:t>, </a:t>
+                </a:r>
+                <a:r>
+                  <a:rPr lang="ko-KR" altLang="en-US" sz="1200" dirty="0">
+                    <a:solidFill>
+                      <a:schemeClr val="tx1"/>
+                    </a:solidFill>
+                  </a:rPr>
+                  <a:t>표면 압력 차가       크게 유지되면서 추가적인 항력 증가가 발생한다</a:t>
+                </a:r>
+                <a:r>
+                  <a:rPr lang="en-US" altLang="ko-KR" sz="1200" dirty="0">
+                    <a:solidFill>
+                      <a:schemeClr val="tx1"/>
+                    </a:solidFill>
+                  </a:rPr>
+                  <a:t>. </a:t>
+                </a:r>
+                <a:r>
+                  <a:rPr lang="ko-KR" altLang="en-US" sz="1200" dirty="0">
+                    <a:solidFill>
+                      <a:schemeClr val="tx1"/>
+                    </a:solidFill>
+                  </a:rPr>
+                  <a:t>이러한 현상은 양력 증가를 위한      강한 </a:t>
+                </a:r>
+                <a:r>
+                  <a:rPr lang="ko-KR" altLang="en-US" sz="1200" dirty="0" err="1">
+                    <a:solidFill>
+                      <a:schemeClr val="tx1"/>
+                    </a:solidFill>
+                  </a:rPr>
+                  <a:t>흡입면</a:t>
+                </a:r>
+                <a:r>
+                  <a:rPr lang="ko-KR" altLang="en-US" sz="1200" dirty="0">
+                    <a:solidFill>
+                      <a:schemeClr val="tx1"/>
+                    </a:solidFill>
+                  </a:rPr>
+                  <a:t> 형성이 필연적으로 항력 증가를 수반한다는 전형적인 양력</a:t>
+                </a:r>
+                <a:r>
+                  <a:rPr lang="en-US" altLang="ko-KR" sz="1200" dirty="0">
+                    <a:solidFill>
+                      <a:schemeClr val="tx1"/>
+                    </a:solidFill>
+                  </a:rPr>
+                  <a:t>–</a:t>
+                </a:r>
+                <a:r>
+                  <a:rPr lang="ko-KR" altLang="en-US" sz="1200" dirty="0">
+                    <a:solidFill>
+                      <a:schemeClr val="tx1"/>
+                    </a:solidFill>
+                  </a:rPr>
+                  <a:t>항력 상관관계를 잘 보여준다</a:t>
+                </a:r>
+                <a:r>
+                  <a:rPr lang="en-US" altLang="ko-KR" sz="1200" dirty="0">
+                    <a:solidFill>
+                      <a:schemeClr val="tx1"/>
+                    </a:solidFill>
+                  </a:rPr>
+                  <a:t>.</a:t>
+                </a:r>
+                <a:endParaRPr lang="ko-KR" altLang="en-US" sz="1200" dirty="0">
+                  <a:solidFill>
+                    <a:schemeClr val="tx1"/>
+                  </a:solidFill>
+                </a:endParaRPr>
+              </a:p>
+            </p:txBody>
+          </p:sp>
+        </mc:Choice>
+        <mc:Fallback>
+          <p:sp>
+            <p:nvSpPr>
+              <p:cNvPr id="27" name="TextBox 26">
+                <a:extLst>
+                  <a:ext uri="{FF2B5EF4-FFF2-40B4-BE49-F238E27FC236}">
+                    <a16:creationId xmlns:a16="http://schemas.microsoft.com/office/drawing/2014/main" id="{3F23539A-CC70-F16C-6B89-5263A2ED79D0}"/>
+                  </a:ext>
+                </a:extLst>
+              </p:cNvPr>
+              <p:cNvSpPr txBox="1">
+                <a:spLocks noRot="1" noChangeAspect="1" noMove="1" noResize="1" noEditPoints="1" noAdjustHandles="1" noChangeArrowheads="1" noChangeShapeType="1" noTextEdit="1"/>
+              </p:cNvSpPr>
+              <p:nvPr/>
+            </p:nvSpPr>
+            <p:spPr>
+              <a:xfrm>
+                <a:off x="5881342" y="3740834"/>
+                <a:ext cx="6213247" cy="2677656"/>
+              </a:xfrm>
+              <a:prstGeom prst="rect">
+                <a:avLst/>
+              </a:prstGeom>
+              <a:blipFill>
+                <a:blip r:embed="rId9"/>
+                <a:stretch>
+                  <a:fillRect l="-98" t="-456" b="-911"/>
+                </a:stretch>
+              </a:blipFill>
+            </p:spPr>
+            <p:txBody>
+              <a:bodyPr/>
+              <a:lstStyle/>
+              <a:p>
+                <a:r>
+                  <a:rPr lang="ko-KR" altLang="en-US">
+                    <a:noFill/>
+                  </a:rPr>
+                  <a:t> </a:t>
+                </a:r>
+              </a:p>
+            </p:txBody>
+          </p:sp>
+        </mc:Fallback>
+      </mc:AlternateContent>
+    </p:spTree>
+    <p:extLst>
+      <p:ext uri="{BB962C8B-B14F-4D97-AF65-F5344CB8AC3E}">
+        <p14:creationId xmlns:p14="http://schemas.microsoft.com/office/powerpoint/2010/main" val="2370175907"/>
+      </p:ext>
+    </p:extLst>
+  </p:cSld>
+  <p:clrMapOvr>
+    <a:masterClrMapping/>
+  </p:clrMapOvr>
+</p:sld>
+</file>
+
+<file path=ppt/slides/slide8.xml><?xml version="1.0" encoding="utf-8"?>
+<p:sld xmlns:a="http://schemas.openxmlformats.org/drawingml/2006/main" xmlns:r="http://schemas.openxmlformats.org/officeDocument/2006/relationships" xmlns:p="http://schemas.openxmlformats.org/presentationml/2006/main">
+  <p:cSld>
+    <p:spTree>
+      <p:nvGrpSpPr>
+        <p:cNvPr id="1" name=""/>
+        <p:cNvGrpSpPr/>
+        <p:nvPr/>
+      </p:nvGrpSpPr>
+      <p:grpSpPr>
+        <a:xfrm>
+          <a:off x="0" y="0"/>
+          <a:ext cx="0" cy="0"/>
+          <a:chOff x="0" y="0"/>
+          <a:chExt cx="0" cy="0"/>
+        </a:xfrm>
+      </p:grpSpPr>
+      <p:sp>
+        <p:nvSpPr>
           <p:cNvPr id="2" name="제목 1"/>
           <p:cNvSpPr>
             <a:spLocks noGrp="1"/>
@@ -26033,7 +27571,7 @@
               <a:pPr>
                 <a:defRPr/>
               </a:pPr>
-              <a:t>7</a:t>
+              <a:t>8</a:t>
             </a:fld>
             <a:endParaRPr lang="ko-KR" altLang="en-US" dirty="0">
               <a:solidFill>
@@ -26144,7 +27682,7 @@
     <mc:Choice Requires="p14">
       <p:transition/>
     </mc:Choice>
-    <mc:Fallback xmlns="" xmlns:c="http://schemas.openxmlformats.org/drawingml/2006/chart" xmlns:dgm="http://schemas.openxmlformats.org/drawingml/2006/diagram" xmlns:dsp="http://schemas.microsoft.com/office/drawing/2008/diagram">
+    <mc:Fallback xmlns:dsp="http://schemas.microsoft.com/office/drawing/2008/diagram" xmlns:dgm="http://schemas.openxmlformats.org/drawingml/2006/diagram" xmlns:c="http://schemas.openxmlformats.org/drawingml/2006/chart" xmlns="">
       <p:transition/>
     </mc:Fallback>
   </mc:AlternateContent>
